--- a/lectures/lecture_3/lecture_3.pptx
+++ b/lectures/lecture_3/lecture_3.pptx
@@ -28,6 +28,8 @@
     <p:sldId id="275" r:id="rId22"/>
     <p:sldId id="276" r:id="rId23"/>
     <p:sldId id="278" r:id="rId24"/>
+    <p:sldId id="279" r:id="rId25"/>
+    <p:sldId id="280" r:id="rId26"/>
   </p:sldIdLst>
   <p:sldSz cx="12192000" cy="6858000"/>
   <p:notesSz cx="6858000" cy="9144000"/>
@@ -12247,6 +12249,3005 @@
 </p:sld>
 </file>
 
+<file path=ppt/slides/slide24.xml><?xml version="1.0" encoding="utf-8"?>
+<p:sld xmlns:a="http://schemas.openxmlformats.org/drawingml/2006/main" xmlns:r="http://schemas.openxmlformats.org/officeDocument/2006/relationships" xmlns:p="http://schemas.openxmlformats.org/presentationml/2006/main">
+  <p:cSld>
+    <p:bg>
+      <p:bgPr>
+        <a:solidFill>
+          <a:srgbClr val="1A1A2E"/>
+        </a:solidFill>
+        <a:effectLst/>
+      </p:bgPr>
+    </p:bg>
+    <p:spTree>
+      <p:nvGrpSpPr>
+        <p:cNvPr id="1" name=""/>
+        <p:cNvGrpSpPr/>
+        <p:nvPr/>
+      </p:nvGrpSpPr>
+      <p:grpSpPr>
+        <a:xfrm>
+          <a:off x="0" y="0"/>
+          <a:ext cx="0" cy="0"/>
+          <a:chOff x="0" y="0"/>
+          <a:chExt cx="0" cy="0"/>
+        </a:xfrm>
+      </p:grpSpPr>
+      <p:sp>
+        <p:nvSpPr>
+          <p:cNvPr id="2" name="TextBox 1"/>
+          <p:cNvSpPr txBox="1"/>
+          <p:nvPr/>
+        </p:nvSpPr>
+        <p:spPr>
+          <a:xfrm>
+            <a:off x="600000" y="300000"/>
+            <a:ext cx="11000000" cy="700000"/>
+          </a:xfrm>
+          <a:prstGeom prst="rect">
+            <a:avLst/>
+          </a:prstGeom>
+          <a:noFill/>
+        </p:spPr>
+        <p:txBody>
+          <a:bodyPr wrap="square">
+            <a:spAutoFit/>
+          </a:bodyPr>
+          <a:lstStyle/>
+          <a:p>
+            <a:pPr algn="l"/>
+            <a:r>
+              <a:rPr sz="3200" b="1">
+                <a:solidFill>
+                  <a:srgbClr val="FFFFFF"/>
+                </a:solidFill>
+              </a:rPr>
+              <a:t>Рынок LLM: апрель 2026</a:t>
+            </a:r>
+          </a:p>
+        </p:txBody>
+      </p:sp>
+      <p:sp>
+        <p:nvSpPr>
+          <p:cNvPr id="3" name="TextBox 2"/>
+          <p:cNvSpPr txBox="1"/>
+          <p:nvPr/>
+        </p:nvSpPr>
+        <p:spPr>
+          <a:xfrm>
+            <a:off x="600000" y="950000"/>
+            <a:ext cx="11000000" cy="400000"/>
+          </a:xfrm>
+          <a:prstGeom prst="rect">
+            <a:avLst/>
+          </a:prstGeom>
+          <a:noFill/>
+        </p:spPr>
+        <p:txBody>
+          <a:bodyPr wrap="square">
+            <a:spAutoFit/>
+          </a:bodyPr>
+          <a:lstStyle/>
+          <a:p>
+            <a:pPr algn="l"/>
+            <a:r>
+              <a:rPr sz="1600" b="0">
+                <a:solidFill>
+                  <a:srgbClr val="AAAAAA"/>
+                </a:solidFill>
+              </a:rPr>
+              <a:t>Три флагманские модели — одна цена, разные сильные стороны</a:t>
+            </a:r>
+          </a:p>
+        </p:txBody>
+      </p:sp>
+      <p:sp>
+        <p:nvSpPr>
+          <p:cNvPr id="4" name="Rectangle 3"/>
+          <p:cNvSpPr/>
+          <p:nvPr/>
+        </p:nvSpPr>
+        <p:spPr>
+          <a:xfrm>
+            <a:off x="400000" y="1500000"/>
+            <a:ext cx="3500000" cy="550000"/>
+          </a:xfrm>
+          <a:prstGeom prst="rect">
+            <a:avLst/>
+          </a:prstGeom>
+          <a:solidFill>
+            <a:srgbClr val="4EA8D4"/>
+          </a:solidFill>
+          <a:ln>
+            <a:noFill/>
+          </a:ln>
+        </p:spPr>
+        <p:style>
+          <a:lnRef idx="1">
+            <a:schemeClr val="accent1"/>
+          </a:lnRef>
+          <a:fillRef idx="3">
+            <a:schemeClr val="accent1"/>
+          </a:fillRef>
+          <a:effectRef idx="2">
+            <a:schemeClr val="accent1"/>
+          </a:effectRef>
+          <a:fontRef idx="minor">
+            <a:schemeClr val="lt1"/>
+          </a:fontRef>
+        </p:style>
+        <p:txBody>
+          <a:bodyPr rtlCol="0" anchor="ctr"/>
+          <a:lstStyle/>
+          <a:p>
+            <a:pPr algn="ctr"/>
+            <a:endParaRPr/>
+          </a:p>
+        </p:txBody>
+      </p:sp>
+      <p:sp>
+        <p:nvSpPr>
+          <p:cNvPr id="5" name="TextBox 4"/>
+          <p:cNvSpPr txBox="1"/>
+          <p:nvPr/>
+        </p:nvSpPr>
+        <p:spPr>
+          <a:xfrm>
+            <a:off x="480000" y="1580000"/>
+            <a:ext cx="3340000" cy="200000"/>
+          </a:xfrm>
+          <a:prstGeom prst="rect">
+            <a:avLst/>
+          </a:prstGeom>
+          <a:noFill/>
+        </p:spPr>
+        <p:txBody>
+          <a:bodyPr wrap="square">
+            <a:spAutoFit/>
+          </a:bodyPr>
+          <a:lstStyle/>
+          <a:p>
+            <a:pPr algn="l"/>
+            <a:r>
+              <a:rPr sz="1500" b="1">
+                <a:solidFill>
+                  <a:srgbClr val="FFFFFF"/>
+                </a:solidFill>
+              </a:rPr>
+              <a:t>Claude (Anthropic)</a:t>
+            </a:r>
+          </a:p>
+        </p:txBody>
+      </p:sp>
+      <p:sp>
+        <p:nvSpPr>
+          <p:cNvPr id="6" name="TextBox 5"/>
+          <p:cNvSpPr txBox="1"/>
+          <p:nvPr/>
+        </p:nvSpPr>
+        <p:spPr>
+          <a:xfrm>
+            <a:off x="480000" y="1820000"/>
+            <a:ext cx="3340000" cy="200000"/>
+          </a:xfrm>
+          <a:prstGeom prst="rect">
+            <a:avLst/>
+          </a:prstGeom>
+          <a:noFill/>
+        </p:spPr>
+        <p:txBody>
+          <a:bodyPr wrap="square">
+            <a:spAutoFit/>
+          </a:bodyPr>
+          <a:lstStyle/>
+          <a:p>
+            <a:pPr algn="l"/>
+            <a:r>
+              <a:rPr sz="1100" b="0">
+                <a:solidFill>
+                  <a:srgbClr val="EEEEEE"/>
+                </a:solidFill>
+              </a:rPr>
+              <a:t>Opus 4.6 / Sonnet 4.6</a:t>
+            </a:r>
+          </a:p>
+        </p:txBody>
+      </p:sp>
+      <p:sp>
+        <p:nvSpPr>
+          <p:cNvPr id="7" name="Rectangle 6"/>
+          <p:cNvSpPr/>
+          <p:nvPr/>
+        </p:nvSpPr>
+        <p:spPr>
+          <a:xfrm>
+            <a:off x="400000" y="2100000"/>
+            <a:ext cx="3500000" cy="3600000"/>
+          </a:xfrm>
+          <a:prstGeom prst="rect">
+            <a:avLst/>
+          </a:prstGeom>
+          <a:solidFill>
+            <a:srgbClr val="25253E"/>
+          </a:solidFill>
+          <a:ln>
+            <a:noFill/>
+          </a:ln>
+        </p:spPr>
+        <p:style>
+          <a:lnRef idx="1">
+            <a:schemeClr val="accent1"/>
+          </a:lnRef>
+          <a:fillRef idx="3">
+            <a:schemeClr val="accent1"/>
+          </a:fillRef>
+          <a:effectRef idx="2">
+            <a:schemeClr val="accent1"/>
+          </a:effectRef>
+          <a:fontRef idx="minor">
+            <a:schemeClr val="lt1"/>
+          </a:fontRef>
+        </p:style>
+        <p:txBody>
+          <a:bodyPr rtlCol="0" anchor="ctr"/>
+          <a:lstStyle/>
+          <a:p>
+            <a:pPr algn="ctr"/>
+            <a:endParaRPr/>
+          </a:p>
+        </p:txBody>
+      </p:sp>
+      <p:sp>
+        <p:nvSpPr>
+          <p:cNvPr id="8" name="TextBox 7"/>
+          <p:cNvSpPr txBox="1"/>
+          <p:nvPr/>
+        </p:nvSpPr>
+        <p:spPr>
+          <a:xfrm>
+            <a:off x="480000" y="2220000"/>
+            <a:ext cx="3340000" cy="3450000"/>
+          </a:xfrm>
+          <a:prstGeom prst="rect">
+            <a:avLst/>
+          </a:prstGeom>
+          <a:noFill/>
+        </p:spPr>
+        <p:txBody>
+          <a:bodyPr wrap="square">
+            <a:spAutoFit/>
+          </a:bodyPr>
+          <a:lstStyle/>
+          <a:p>
+            <a:pPr algn="l"/>
+            <a:r>
+              <a:rPr sz="1300" b="0">
+                <a:solidFill>
+                  <a:srgbClr val="E0E0E0"/>
+                </a:solidFill>
+              </a:rPr>
+              <a:t>• Лучший для кода (SWE-bench 80.8%)
+• Сложные рассуждения
+• Качественный текст
+• Claude Code — быстрый debug</a:t>
+            </a:r>
+          </a:p>
+        </p:txBody>
+      </p:sp>
+      <p:sp>
+        <p:nvSpPr>
+          <p:cNvPr id="9" name="Rectangle 8"/>
+          <p:cNvSpPr/>
+          <p:nvPr/>
+        </p:nvSpPr>
+        <p:spPr>
+          <a:xfrm>
+            <a:off x="4200000" y="1500000"/>
+            <a:ext cx="3500000" cy="550000"/>
+          </a:xfrm>
+          <a:prstGeom prst="rect">
+            <a:avLst/>
+          </a:prstGeom>
+          <a:solidFill>
+            <a:srgbClr val="10A37F"/>
+          </a:solidFill>
+          <a:ln>
+            <a:noFill/>
+          </a:ln>
+        </p:spPr>
+        <p:style>
+          <a:lnRef idx="1">
+            <a:schemeClr val="accent1"/>
+          </a:lnRef>
+          <a:fillRef idx="3">
+            <a:schemeClr val="accent1"/>
+          </a:fillRef>
+          <a:effectRef idx="2">
+            <a:schemeClr val="accent1"/>
+          </a:effectRef>
+          <a:fontRef idx="minor">
+            <a:schemeClr val="lt1"/>
+          </a:fontRef>
+        </p:style>
+        <p:txBody>
+          <a:bodyPr rtlCol="0" anchor="ctr"/>
+          <a:lstStyle/>
+          <a:p>
+            <a:pPr algn="ctr"/>
+            <a:endParaRPr/>
+          </a:p>
+        </p:txBody>
+      </p:sp>
+      <p:sp>
+        <p:nvSpPr>
+          <p:cNvPr id="10" name="TextBox 9"/>
+          <p:cNvSpPr txBox="1"/>
+          <p:nvPr/>
+        </p:nvSpPr>
+        <p:spPr>
+          <a:xfrm>
+            <a:off x="4280000" y="1580000"/>
+            <a:ext cx="3340000" cy="200000"/>
+          </a:xfrm>
+          <a:prstGeom prst="rect">
+            <a:avLst/>
+          </a:prstGeom>
+          <a:noFill/>
+        </p:spPr>
+        <p:txBody>
+          <a:bodyPr wrap="square">
+            <a:spAutoFit/>
+          </a:bodyPr>
+          <a:lstStyle/>
+          <a:p>
+            <a:pPr algn="l"/>
+            <a:r>
+              <a:rPr sz="1500" b="1">
+                <a:solidFill>
+                  <a:srgbClr val="FFFFFF"/>
+                </a:solidFill>
+              </a:rPr>
+              <a:t>ChatGPT (OpenAI)</a:t>
+            </a:r>
+          </a:p>
+        </p:txBody>
+      </p:sp>
+      <p:sp>
+        <p:nvSpPr>
+          <p:cNvPr id="11" name="TextBox 10"/>
+          <p:cNvSpPr txBox="1"/>
+          <p:nvPr/>
+        </p:nvSpPr>
+        <p:spPr>
+          <a:xfrm>
+            <a:off x="4280000" y="1820000"/>
+            <a:ext cx="3340000" cy="200000"/>
+          </a:xfrm>
+          <a:prstGeom prst="rect">
+            <a:avLst/>
+          </a:prstGeom>
+          <a:noFill/>
+        </p:spPr>
+        <p:txBody>
+          <a:bodyPr wrap="square">
+            <a:spAutoFit/>
+          </a:bodyPr>
+          <a:lstStyle/>
+          <a:p>
+            <a:pPr algn="l"/>
+            <a:r>
+              <a:rPr sz="1100" b="0">
+                <a:solidFill>
+                  <a:srgbClr val="EEEEEE"/>
+                </a:solidFill>
+              </a:rPr>
+              <a:t>GPT-5.4 / GPT-5.4 Thinking</a:t>
+            </a:r>
+          </a:p>
+        </p:txBody>
+      </p:sp>
+      <p:sp>
+        <p:nvSpPr>
+          <p:cNvPr id="12" name="Rectangle 11"/>
+          <p:cNvSpPr/>
+          <p:nvPr/>
+        </p:nvSpPr>
+        <p:spPr>
+          <a:xfrm>
+            <a:off x="4200000" y="2100000"/>
+            <a:ext cx="3500000" cy="3600000"/>
+          </a:xfrm>
+          <a:prstGeom prst="rect">
+            <a:avLst/>
+          </a:prstGeom>
+          <a:solidFill>
+            <a:srgbClr val="25253E"/>
+          </a:solidFill>
+          <a:ln>
+            <a:noFill/>
+          </a:ln>
+        </p:spPr>
+        <p:style>
+          <a:lnRef idx="1">
+            <a:schemeClr val="accent1"/>
+          </a:lnRef>
+          <a:fillRef idx="3">
+            <a:schemeClr val="accent1"/>
+          </a:fillRef>
+          <a:effectRef idx="2">
+            <a:schemeClr val="accent1"/>
+          </a:effectRef>
+          <a:fontRef idx="minor">
+            <a:schemeClr val="lt1"/>
+          </a:fontRef>
+        </p:style>
+        <p:txBody>
+          <a:bodyPr rtlCol="0" anchor="ctr"/>
+          <a:lstStyle/>
+          <a:p>
+            <a:pPr algn="ctr"/>
+            <a:endParaRPr/>
+          </a:p>
+        </p:txBody>
+      </p:sp>
+      <p:sp>
+        <p:nvSpPr>
+          <p:cNvPr id="13" name="TextBox 12"/>
+          <p:cNvSpPr txBox="1"/>
+          <p:nvPr/>
+        </p:nvSpPr>
+        <p:spPr>
+          <a:xfrm>
+            <a:off x="4280000" y="2220000"/>
+            <a:ext cx="3340000" cy="3450000"/>
+          </a:xfrm>
+          <a:prstGeom prst="rect">
+            <a:avLst/>
+          </a:prstGeom>
+          <a:noFill/>
+        </p:spPr>
+        <p:txBody>
+          <a:bodyPr wrap="square">
+            <a:spAutoFit/>
+          </a:bodyPr>
+          <a:lstStyle/>
+          <a:p>
+            <a:pPr algn="l"/>
+            <a:r>
+              <a:rPr sz="1300" b="0">
+                <a:solidFill>
+                  <a:srgbClr val="E0E0E0"/>
+                </a:solidFill>
+              </a:rPr>
+              <a:t>• Computer Use нативно
+• Широкая экосистема
+• GPT-5.4 Thinking — прозрачные рассуждения
+• Лучший голосовой режим</a:t>
+            </a:r>
+          </a:p>
+        </p:txBody>
+      </p:sp>
+      <p:sp>
+        <p:nvSpPr>
+          <p:cNvPr id="14" name="Rectangle 13"/>
+          <p:cNvSpPr/>
+          <p:nvPr/>
+        </p:nvSpPr>
+        <p:spPr>
+          <a:xfrm>
+            <a:off x="8000000" y="1500000"/>
+            <a:ext cx="3500000" cy="550000"/>
+          </a:xfrm>
+          <a:prstGeom prst="rect">
+            <a:avLst/>
+          </a:prstGeom>
+          <a:solidFill>
+            <a:srgbClr val="EA4335"/>
+          </a:solidFill>
+          <a:ln>
+            <a:noFill/>
+          </a:ln>
+        </p:spPr>
+        <p:style>
+          <a:lnRef idx="1">
+            <a:schemeClr val="accent1"/>
+          </a:lnRef>
+          <a:fillRef idx="3">
+            <a:schemeClr val="accent1"/>
+          </a:fillRef>
+          <a:effectRef idx="2">
+            <a:schemeClr val="accent1"/>
+          </a:effectRef>
+          <a:fontRef idx="minor">
+            <a:schemeClr val="lt1"/>
+          </a:fontRef>
+        </p:style>
+        <p:txBody>
+          <a:bodyPr rtlCol="0" anchor="ctr"/>
+          <a:lstStyle/>
+          <a:p>
+            <a:pPr algn="ctr"/>
+            <a:endParaRPr/>
+          </a:p>
+        </p:txBody>
+      </p:sp>
+      <p:sp>
+        <p:nvSpPr>
+          <p:cNvPr id="15" name="TextBox 14"/>
+          <p:cNvSpPr txBox="1"/>
+          <p:nvPr/>
+        </p:nvSpPr>
+        <p:spPr>
+          <a:xfrm>
+            <a:off x="8080000" y="1580000"/>
+            <a:ext cx="3340000" cy="200000"/>
+          </a:xfrm>
+          <a:prstGeom prst="rect">
+            <a:avLst/>
+          </a:prstGeom>
+          <a:noFill/>
+        </p:spPr>
+        <p:txBody>
+          <a:bodyPr wrap="square">
+            <a:spAutoFit/>
+          </a:bodyPr>
+          <a:lstStyle/>
+          <a:p>
+            <a:pPr algn="l"/>
+            <a:r>
+              <a:rPr sz="1500" b="1">
+                <a:solidFill>
+                  <a:srgbClr val="FFFFFF"/>
+                </a:solidFill>
+              </a:rPr>
+              <a:t>Gemini (Google)</a:t>
+            </a:r>
+          </a:p>
+        </p:txBody>
+      </p:sp>
+      <p:sp>
+        <p:nvSpPr>
+          <p:cNvPr id="16" name="TextBox 15"/>
+          <p:cNvSpPr txBox="1"/>
+          <p:nvPr/>
+        </p:nvSpPr>
+        <p:spPr>
+          <a:xfrm>
+            <a:off x="8080000" y="1820000"/>
+            <a:ext cx="3340000" cy="200000"/>
+          </a:xfrm>
+          <a:prstGeom prst="rect">
+            <a:avLst/>
+          </a:prstGeom>
+          <a:noFill/>
+        </p:spPr>
+        <p:txBody>
+          <a:bodyPr wrap="square">
+            <a:spAutoFit/>
+          </a:bodyPr>
+          <a:lstStyle/>
+          <a:p>
+            <a:pPr algn="l"/>
+            <a:r>
+              <a:rPr sz="1100" b="0">
+                <a:solidFill>
+                  <a:srgbClr val="EEEEEE"/>
+                </a:solidFill>
+              </a:rPr>
+              <a:t>Gemini 3.1 Pro</a:t>
+            </a:r>
+          </a:p>
+        </p:txBody>
+      </p:sp>
+      <p:sp>
+        <p:nvSpPr>
+          <p:cNvPr id="17" name="Rectangle 16"/>
+          <p:cNvSpPr/>
+          <p:nvPr/>
+        </p:nvSpPr>
+        <p:spPr>
+          <a:xfrm>
+            <a:off x="8000000" y="2100000"/>
+            <a:ext cx="3500000" cy="3600000"/>
+          </a:xfrm>
+          <a:prstGeom prst="rect">
+            <a:avLst/>
+          </a:prstGeom>
+          <a:solidFill>
+            <a:srgbClr val="25253E"/>
+          </a:solidFill>
+          <a:ln>
+            <a:noFill/>
+          </a:ln>
+        </p:spPr>
+        <p:style>
+          <a:lnRef idx="1">
+            <a:schemeClr val="accent1"/>
+          </a:lnRef>
+          <a:fillRef idx="3">
+            <a:schemeClr val="accent1"/>
+          </a:fillRef>
+          <a:effectRef idx="2">
+            <a:schemeClr val="accent1"/>
+          </a:effectRef>
+          <a:fontRef idx="minor">
+            <a:schemeClr val="lt1"/>
+          </a:fontRef>
+        </p:style>
+        <p:txBody>
+          <a:bodyPr rtlCol="0" anchor="ctr"/>
+          <a:lstStyle/>
+          <a:p>
+            <a:pPr algn="ctr"/>
+            <a:endParaRPr/>
+          </a:p>
+        </p:txBody>
+      </p:sp>
+      <p:sp>
+        <p:nvSpPr>
+          <p:cNvPr id="18" name="TextBox 17"/>
+          <p:cNvSpPr txBox="1"/>
+          <p:nvPr/>
+        </p:nvSpPr>
+        <p:spPr>
+          <a:xfrm>
+            <a:off x="8080000" y="2220000"/>
+            <a:ext cx="3340000" cy="3450000"/>
+          </a:xfrm>
+          <a:prstGeom prst="rect">
+            <a:avLst/>
+          </a:prstGeom>
+          <a:noFill/>
+        </p:spPr>
+        <p:txBody>
+          <a:bodyPr wrap="square">
+            <a:spAutoFit/>
+          </a:bodyPr>
+          <a:lstStyle/>
+          <a:p>
+            <a:pPr algn="l"/>
+            <a:r>
+              <a:rPr sz="1300" b="0">
+                <a:solidFill>
+                  <a:srgbClr val="E0E0E0"/>
+                </a:solidFill>
+              </a:rPr>
+              <a:t>• Контекст 1–2M токенов
+• Reasoning 94.1%
+• Мультимодальность (видео, аудио)
+• Глубокая интеграция Google</a:t>
+            </a:r>
+          </a:p>
+        </p:txBody>
+      </p:sp>
+      <p:sp>
+        <p:nvSpPr>
+          <p:cNvPr id="19" name="TextBox 18"/>
+          <p:cNvSpPr txBox="1"/>
+          <p:nvPr/>
+        </p:nvSpPr>
+        <p:spPr>
+          <a:xfrm>
+            <a:off x="600000" y="5900000"/>
+            <a:ext cx="11000000" cy="350000"/>
+          </a:xfrm>
+          <a:prstGeom prst="rect">
+            <a:avLst/>
+          </a:prstGeom>
+          <a:noFill/>
+        </p:spPr>
+        <p:txBody>
+          <a:bodyPr wrap="square">
+            <a:spAutoFit/>
+          </a:bodyPr>
+          <a:lstStyle/>
+          <a:p>
+            <a:pPr algn="ctr"/>
+            <a:r>
+              <a:rPr sz="1000" b="0">
+                <a:solidFill>
+                  <a:srgbClr val="777788"/>
+                </a:solidFill>
+              </a:rPr>
+              <a:t>Цена: $20/мес у всех трёх   |   Источник: tech-insider.org, апрель 2026</a:t>
+            </a:r>
+          </a:p>
+        </p:txBody>
+      </p:sp>
+    </p:spTree>
+  </p:cSld>
+  <p:clrMapOvr>
+    <a:masterClrMapping/>
+  </p:clrMapOvr>
+</p:sld>
+</file>
+
+<file path=ppt/slides/slide25.xml><?xml version="1.0" encoding="utf-8"?>
+<p:sld xmlns:a="http://schemas.openxmlformats.org/drawingml/2006/main" xmlns:r="http://schemas.openxmlformats.org/officeDocument/2006/relationships" xmlns:p="http://schemas.openxmlformats.org/presentationml/2006/main">
+  <p:cSld>
+    <p:bg>
+      <p:bgPr>
+        <a:solidFill>
+          <a:srgbClr val="1A1A2E"/>
+        </a:solidFill>
+        <a:effectLst/>
+      </p:bgPr>
+    </p:bg>
+    <p:spTree>
+      <p:nvGrpSpPr>
+        <p:cNvPr id="1" name=""/>
+        <p:cNvGrpSpPr/>
+        <p:nvPr/>
+      </p:nvGrpSpPr>
+      <p:grpSpPr>
+        <a:xfrm>
+          <a:off x="0" y="0"/>
+          <a:ext cx="0" cy="0"/>
+          <a:chOff x="0" y="0"/>
+          <a:chExt cx="0" cy="0"/>
+        </a:xfrm>
+      </p:grpSpPr>
+      <p:sp>
+        <p:nvSpPr>
+          <p:cNvPr id="2" name="TextBox 1"/>
+          <p:cNvSpPr txBox="1"/>
+          <p:nvPr/>
+        </p:nvSpPr>
+        <p:spPr>
+          <a:xfrm>
+            <a:off x="600000" y="300000"/>
+            <a:ext cx="11000000" cy="700000"/>
+          </a:xfrm>
+          <a:prstGeom prst="rect">
+            <a:avLst/>
+          </a:prstGeom>
+          <a:noFill/>
+        </p:spPr>
+        <p:txBody>
+          <a:bodyPr wrap="square">
+            <a:spAutoFit/>
+          </a:bodyPr>
+          <a:lstStyle/>
+          <a:p>
+            <a:pPr algn="l"/>
+            <a:r>
+              <a:rPr sz="3200" b="1">
+                <a:solidFill>
+                  <a:srgbClr val="FFFFFF"/>
+                </a:solidFill>
+              </a:rPr>
+              <a:t>Сравнение по задачам</a:t>
+            </a:r>
+          </a:p>
+        </p:txBody>
+      </p:sp>
+      <p:sp>
+        <p:nvSpPr>
+          <p:cNvPr id="3" name="Rectangle 2"/>
+          <p:cNvSpPr/>
+          <p:nvPr/>
+        </p:nvSpPr>
+        <p:spPr>
+          <a:xfrm>
+            <a:off x="500000" y="1200000"/>
+            <a:ext cx="3000000" cy="480000"/>
+          </a:xfrm>
+          <a:prstGeom prst="rect">
+            <a:avLst/>
+          </a:prstGeom>
+          <a:solidFill>
+            <a:srgbClr val="303050"/>
+          </a:solidFill>
+          <a:ln>
+            <a:noFill/>
+          </a:ln>
+        </p:spPr>
+        <p:style>
+          <a:lnRef idx="1">
+            <a:schemeClr val="accent1"/>
+          </a:lnRef>
+          <a:fillRef idx="3">
+            <a:schemeClr val="accent1"/>
+          </a:fillRef>
+          <a:effectRef idx="2">
+            <a:schemeClr val="accent1"/>
+          </a:effectRef>
+          <a:fontRef idx="minor">
+            <a:schemeClr val="lt1"/>
+          </a:fontRef>
+        </p:style>
+        <p:txBody>
+          <a:bodyPr rtlCol="0" anchor="ctr"/>
+          <a:lstStyle/>
+          <a:p>
+            <a:pPr algn="ctr"/>
+            <a:endParaRPr/>
+          </a:p>
+        </p:txBody>
+      </p:sp>
+      <p:sp>
+        <p:nvSpPr>
+          <p:cNvPr id="4" name="TextBox 3"/>
+          <p:cNvSpPr txBox="1"/>
+          <p:nvPr/>
+        </p:nvSpPr>
+        <p:spPr>
+          <a:xfrm>
+            <a:off x="580000" y="1300000"/>
+            <a:ext cx="2840000" cy="380000"/>
+          </a:xfrm>
+          <a:prstGeom prst="rect">
+            <a:avLst/>
+          </a:prstGeom>
+          <a:noFill/>
+        </p:spPr>
+        <p:txBody>
+          <a:bodyPr wrap="square">
+            <a:spAutoFit/>
+          </a:bodyPr>
+          <a:lstStyle/>
+          <a:p>
+            <a:pPr algn="l"/>
+            <a:r>
+              <a:rPr sz="1400" b="1">
+                <a:solidFill>
+                  <a:srgbClr val="FFFFFF"/>
+                </a:solidFill>
+              </a:rPr>
+              <a:t>Задача</a:t>
+            </a:r>
+          </a:p>
+        </p:txBody>
+      </p:sp>
+      <p:sp>
+        <p:nvSpPr>
+          <p:cNvPr id="5" name="Rectangle 4"/>
+          <p:cNvSpPr/>
+          <p:nvPr/>
+        </p:nvSpPr>
+        <p:spPr>
+          <a:xfrm>
+            <a:off x="3560000" y="1200000"/>
+            <a:ext cx="2500000" cy="480000"/>
+          </a:xfrm>
+          <a:prstGeom prst="rect">
+            <a:avLst/>
+          </a:prstGeom>
+          <a:solidFill>
+            <a:srgbClr val="4EA8D4"/>
+          </a:solidFill>
+          <a:ln>
+            <a:noFill/>
+          </a:ln>
+        </p:spPr>
+        <p:style>
+          <a:lnRef idx="1">
+            <a:schemeClr val="accent1"/>
+          </a:lnRef>
+          <a:fillRef idx="3">
+            <a:schemeClr val="accent1"/>
+          </a:fillRef>
+          <a:effectRef idx="2">
+            <a:schemeClr val="accent1"/>
+          </a:effectRef>
+          <a:fontRef idx="minor">
+            <a:schemeClr val="lt1"/>
+          </a:fontRef>
+        </p:style>
+        <p:txBody>
+          <a:bodyPr rtlCol="0" anchor="ctr"/>
+          <a:lstStyle/>
+          <a:p>
+            <a:pPr algn="ctr"/>
+            <a:endParaRPr/>
+          </a:p>
+        </p:txBody>
+      </p:sp>
+      <p:sp>
+        <p:nvSpPr>
+          <p:cNvPr id="6" name="TextBox 5"/>
+          <p:cNvSpPr txBox="1"/>
+          <p:nvPr/>
+        </p:nvSpPr>
+        <p:spPr>
+          <a:xfrm>
+            <a:off x="3640000" y="1300000"/>
+            <a:ext cx="2340000" cy="380000"/>
+          </a:xfrm>
+          <a:prstGeom prst="rect">
+            <a:avLst/>
+          </a:prstGeom>
+          <a:noFill/>
+        </p:spPr>
+        <p:txBody>
+          <a:bodyPr wrap="square">
+            <a:spAutoFit/>
+          </a:bodyPr>
+          <a:lstStyle/>
+          <a:p>
+            <a:pPr algn="ctr"/>
+            <a:r>
+              <a:rPr sz="1400" b="1">
+                <a:solidFill>
+                  <a:srgbClr val="FFFFFF"/>
+                </a:solidFill>
+              </a:rPr>
+              <a:t>Claude</a:t>
+            </a:r>
+          </a:p>
+        </p:txBody>
+      </p:sp>
+      <p:sp>
+        <p:nvSpPr>
+          <p:cNvPr id="7" name="Rectangle 6"/>
+          <p:cNvSpPr/>
+          <p:nvPr/>
+        </p:nvSpPr>
+        <p:spPr>
+          <a:xfrm>
+            <a:off x="6120000" y="1200000"/>
+            <a:ext cx="2700000" cy="480000"/>
+          </a:xfrm>
+          <a:prstGeom prst="rect">
+            <a:avLst/>
+          </a:prstGeom>
+          <a:solidFill>
+            <a:srgbClr val="10A37F"/>
+          </a:solidFill>
+          <a:ln>
+            <a:noFill/>
+          </a:ln>
+        </p:spPr>
+        <p:style>
+          <a:lnRef idx="1">
+            <a:schemeClr val="accent1"/>
+          </a:lnRef>
+          <a:fillRef idx="3">
+            <a:schemeClr val="accent1"/>
+          </a:fillRef>
+          <a:effectRef idx="2">
+            <a:schemeClr val="accent1"/>
+          </a:effectRef>
+          <a:fontRef idx="minor">
+            <a:schemeClr val="lt1"/>
+          </a:fontRef>
+        </p:style>
+        <p:txBody>
+          <a:bodyPr rtlCol="0" anchor="ctr"/>
+          <a:lstStyle/>
+          <a:p>
+            <a:pPr algn="ctr"/>
+            <a:endParaRPr/>
+          </a:p>
+        </p:txBody>
+      </p:sp>
+      <p:sp>
+        <p:nvSpPr>
+          <p:cNvPr id="8" name="TextBox 7"/>
+          <p:cNvSpPr txBox="1"/>
+          <p:nvPr/>
+        </p:nvSpPr>
+        <p:spPr>
+          <a:xfrm>
+            <a:off x="6200000" y="1300000"/>
+            <a:ext cx="2540000" cy="380000"/>
+          </a:xfrm>
+          <a:prstGeom prst="rect">
+            <a:avLst/>
+          </a:prstGeom>
+          <a:noFill/>
+        </p:spPr>
+        <p:txBody>
+          <a:bodyPr wrap="square">
+            <a:spAutoFit/>
+          </a:bodyPr>
+          <a:lstStyle/>
+          <a:p>
+            <a:pPr algn="ctr"/>
+            <a:r>
+              <a:rPr sz="1400" b="1">
+                <a:solidFill>
+                  <a:srgbClr val="FFFFFF"/>
+                </a:solidFill>
+              </a:rPr>
+              <a:t>ChatGPT</a:t>
+            </a:r>
+          </a:p>
+        </p:txBody>
+      </p:sp>
+      <p:sp>
+        <p:nvSpPr>
+          <p:cNvPr id="9" name="Rectangle 8"/>
+          <p:cNvSpPr/>
+          <p:nvPr/>
+        </p:nvSpPr>
+        <p:spPr>
+          <a:xfrm>
+            <a:off x="8880000" y="1200000"/>
+            <a:ext cx="2600000" cy="480000"/>
+          </a:xfrm>
+          <a:prstGeom prst="rect">
+            <a:avLst/>
+          </a:prstGeom>
+          <a:solidFill>
+            <a:srgbClr val="EA4335"/>
+          </a:solidFill>
+          <a:ln>
+            <a:noFill/>
+          </a:ln>
+        </p:spPr>
+        <p:style>
+          <a:lnRef idx="1">
+            <a:schemeClr val="accent1"/>
+          </a:lnRef>
+          <a:fillRef idx="3">
+            <a:schemeClr val="accent1"/>
+          </a:fillRef>
+          <a:effectRef idx="2">
+            <a:schemeClr val="accent1"/>
+          </a:effectRef>
+          <a:fontRef idx="minor">
+            <a:schemeClr val="lt1"/>
+          </a:fontRef>
+        </p:style>
+        <p:txBody>
+          <a:bodyPr rtlCol="0" anchor="ctr"/>
+          <a:lstStyle/>
+          <a:p>
+            <a:pPr algn="ctr"/>
+            <a:endParaRPr/>
+          </a:p>
+        </p:txBody>
+      </p:sp>
+      <p:sp>
+        <p:nvSpPr>
+          <p:cNvPr id="10" name="TextBox 9"/>
+          <p:cNvSpPr txBox="1"/>
+          <p:nvPr/>
+        </p:nvSpPr>
+        <p:spPr>
+          <a:xfrm>
+            <a:off x="8960000" y="1300000"/>
+            <a:ext cx="2440000" cy="380000"/>
+          </a:xfrm>
+          <a:prstGeom prst="rect">
+            <a:avLst/>
+          </a:prstGeom>
+          <a:noFill/>
+        </p:spPr>
+        <p:txBody>
+          <a:bodyPr wrap="square">
+            <a:spAutoFit/>
+          </a:bodyPr>
+          <a:lstStyle/>
+          <a:p>
+            <a:pPr algn="ctr"/>
+            <a:r>
+              <a:rPr sz="1400" b="1">
+                <a:solidFill>
+                  <a:srgbClr val="FFFFFF"/>
+                </a:solidFill>
+              </a:rPr>
+              <a:t>Gemini</a:t>
+            </a:r>
+          </a:p>
+        </p:txBody>
+      </p:sp>
+      <p:sp>
+        <p:nvSpPr>
+          <p:cNvPr id="11" name="Rectangle 10"/>
+          <p:cNvSpPr/>
+          <p:nvPr/>
+        </p:nvSpPr>
+        <p:spPr>
+          <a:xfrm>
+            <a:off x="500000" y="1720000"/>
+            <a:ext cx="3000000" cy="480000"/>
+          </a:xfrm>
+          <a:prstGeom prst="rect">
+            <a:avLst/>
+          </a:prstGeom>
+          <a:solidFill>
+            <a:srgbClr val="222238"/>
+          </a:solidFill>
+          <a:ln>
+            <a:noFill/>
+          </a:ln>
+        </p:spPr>
+        <p:style>
+          <a:lnRef idx="1">
+            <a:schemeClr val="accent1"/>
+          </a:lnRef>
+          <a:fillRef idx="3">
+            <a:schemeClr val="accent1"/>
+          </a:fillRef>
+          <a:effectRef idx="2">
+            <a:schemeClr val="accent1"/>
+          </a:effectRef>
+          <a:fontRef idx="minor">
+            <a:schemeClr val="lt1"/>
+          </a:fontRef>
+        </p:style>
+        <p:txBody>
+          <a:bodyPr rtlCol="0" anchor="ctr"/>
+          <a:lstStyle/>
+          <a:p>
+            <a:pPr algn="ctr"/>
+            <a:endParaRPr/>
+          </a:p>
+        </p:txBody>
+      </p:sp>
+      <p:sp>
+        <p:nvSpPr>
+          <p:cNvPr id="12" name="TextBox 11"/>
+          <p:cNvSpPr txBox="1"/>
+          <p:nvPr/>
+        </p:nvSpPr>
+        <p:spPr>
+          <a:xfrm>
+            <a:off x="580000" y="1820000"/>
+            <a:ext cx="2840000" cy="380000"/>
+          </a:xfrm>
+          <a:prstGeom prst="rect">
+            <a:avLst/>
+          </a:prstGeom>
+          <a:noFill/>
+        </p:spPr>
+        <p:txBody>
+          <a:bodyPr wrap="square">
+            <a:spAutoFit/>
+          </a:bodyPr>
+          <a:lstStyle/>
+          <a:p>
+            <a:pPr algn="l"/>
+            <a:r>
+              <a:rPr sz="1300" b="1">
+                <a:solidFill>
+                  <a:srgbClr val="E0E0E0"/>
+                </a:solidFill>
+              </a:rPr>
+              <a:t>Код</a:t>
+            </a:r>
+          </a:p>
+        </p:txBody>
+      </p:sp>
+      <p:sp>
+        <p:nvSpPr>
+          <p:cNvPr id="13" name="Rectangle 12"/>
+          <p:cNvSpPr/>
+          <p:nvPr/>
+        </p:nvSpPr>
+        <p:spPr>
+          <a:xfrm>
+            <a:off x="3560000" y="1720000"/>
+            <a:ext cx="2500000" cy="480000"/>
+          </a:xfrm>
+          <a:prstGeom prst="rect">
+            <a:avLst/>
+          </a:prstGeom>
+          <a:solidFill>
+            <a:srgbClr val="222238"/>
+          </a:solidFill>
+          <a:ln>
+            <a:noFill/>
+          </a:ln>
+        </p:spPr>
+        <p:style>
+          <a:lnRef idx="1">
+            <a:schemeClr val="accent1"/>
+          </a:lnRef>
+          <a:fillRef idx="3">
+            <a:schemeClr val="accent1"/>
+          </a:fillRef>
+          <a:effectRef idx="2">
+            <a:schemeClr val="accent1"/>
+          </a:effectRef>
+          <a:fontRef idx="minor">
+            <a:schemeClr val="lt1"/>
+          </a:fontRef>
+        </p:style>
+        <p:txBody>
+          <a:bodyPr rtlCol="0" anchor="ctr"/>
+          <a:lstStyle/>
+          <a:p>
+            <a:pPr algn="ctr"/>
+            <a:endParaRPr/>
+          </a:p>
+        </p:txBody>
+      </p:sp>
+      <p:sp>
+        <p:nvSpPr>
+          <p:cNvPr id="14" name="TextBox 13"/>
+          <p:cNvSpPr txBox="1"/>
+          <p:nvPr/>
+        </p:nvSpPr>
+        <p:spPr>
+          <a:xfrm>
+            <a:off x="3640000" y="1820000"/>
+            <a:ext cx="2340000" cy="380000"/>
+          </a:xfrm>
+          <a:prstGeom prst="rect">
+            <a:avLst/>
+          </a:prstGeom>
+          <a:noFill/>
+        </p:spPr>
+        <p:txBody>
+          <a:bodyPr wrap="square">
+            <a:spAutoFit/>
+          </a:bodyPr>
+          <a:lstStyle/>
+          <a:p>
+            <a:pPr algn="ctr"/>
+            <a:r>
+              <a:rPr sz="1500" b="0">
+                <a:solidFill>
+                  <a:srgbClr val="FFD700"/>
+                </a:solidFill>
+              </a:rPr>
+              <a:t>★★★</a:t>
+            </a:r>
+          </a:p>
+        </p:txBody>
+      </p:sp>
+      <p:sp>
+        <p:nvSpPr>
+          <p:cNvPr id="15" name="Rectangle 14"/>
+          <p:cNvSpPr/>
+          <p:nvPr/>
+        </p:nvSpPr>
+        <p:spPr>
+          <a:xfrm>
+            <a:off x="6120000" y="1720000"/>
+            <a:ext cx="2700000" cy="480000"/>
+          </a:xfrm>
+          <a:prstGeom prst="rect">
+            <a:avLst/>
+          </a:prstGeom>
+          <a:solidFill>
+            <a:srgbClr val="222238"/>
+          </a:solidFill>
+          <a:ln>
+            <a:noFill/>
+          </a:ln>
+        </p:spPr>
+        <p:style>
+          <a:lnRef idx="1">
+            <a:schemeClr val="accent1"/>
+          </a:lnRef>
+          <a:fillRef idx="3">
+            <a:schemeClr val="accent1"/>
+          </a:fillRef>
+          <a:effectRef idx="2">
+            <a:schemeClr val="accent1"/>
+          </a:effectRef>
+          <a:fontRef idx="minor">
+            <a:schemeClr val="lt1"/>
+          </a:fontRef>
+        </p:style>
+        <p:txBody>
+          <a:bodyPr rtlCol="0" anchor="ctr"/>
+          <a:lstStyle/>
+          <a:p>
+            <a:pPr algn="ctr"/>
+            <a:endParaRPr/>
+          </a:p>
+        </p:txBody>
+      </p:sp>
+      <p:sp>
+        <p:nvSpPr>
+          <p:cNvPr id="16" name="TextBox 15"/>
+          <p:cNvSpPr txBox="1"/>
+          <p:nvPr/>
+        </p:nvSpPr>
+        <p:spPr>
+          <a:xfrm>
+            <a:off x="6200000" y="1820000"/>
+            <a:ext cx="2540000" cy="380000"/>
+          </a:xfrm>
+          <a:prstGeom prst="rect">
+            <a:avLst/>
+          </a:prstGeom>
+          <a:noFill/>
+        </p:spPr>
+        <p:txBody>
+          <a:bodyPr wrap="square">
+            <a:spAutoFit/>
+          </a:bodyPr>
+          <a:lstStyle/>
+          <a:p>
+            <a:pPr algn="ctr"/>
+            <a:r>
+              <a:rPr sz="1500" b="0">
+                <a:solidFill>
+                  <a:srgbClr val="FFD700"/>
+                </a:solidFill>
+              </a:rPr>
+              <a:t>★★☆</a:t>
+            </a:r>
+          </a:p>
+        </p:txBody>
+      </p:sp>
+      <p:sp>
+        <p:nvSpPr>
+          <p:cNvPr id="17" name="Rectangle 16"/>
+          <p:cNvSpPr/>
+          <p:nvPr/>
+        </p:nvSpPr>
+        <p:spPr>
+          <a:xfrm>
+            <a:off x="8880000" y="1720000"/>
+            <a:ext cx="2600000" cy="480000"/>
+          </a:xfrm>
+          <a:prstGeom prst="rect">
+            <a:avLst/>
+          </a:prstGeom>
+          <a:solidFill>
+            <a:srgbClr val="222238"/>
+          </a:solidFill>
+          <a:ln>
+            <a:noFill/>
+          </a:ln>
+        </p:spPr>
+        <p:style>
+          <a:lnRef idx="1">
+            <a:schemeClr val="accent1"/>
+          </a:lnRef>
+          <a:fillRef idx="3">
+            <a:schemeClr val="accent1"/>
+          </a:fillRef>
+          <a:effectRef idx="2">
+            <a:schemeClr val="accent1"/>
+          </a:effectRef>
+          <a:fontRef idx="minor">
+            <a:schemeClr val="lt1"/>
+          </a:fontRef>
+        </p:style>
+        <p:txBody>
+          <a:bodyPr rtlCol="0" anchor="ctr"/>
+          <a:lstStyle/>
+          <a:p>
+            <a:pPr algn="ctr"/>
+            <a:endParaRPr/>
+          </a:p>
+        </p:txBody>
+      </p:sp>
+      <p:sp>
+        <p:nvSpPr>
+          <p:cNvPr id="18" name="TextBox 17"/>
+          <p:cNvSpPr txBox="1"/>
+          <p:nvPr/>
+        </p:nvSpPr>
+        <p:spPr>
+          <a:xfrm>
+            <a:off x="8960000" y="1820000"/>
+            <a:ext cx="2440000" cy="380000"/>
+          </a:xfrm>
+          <a:prstGeom prst="rect">
+            <a:avLst/>
+          </a:prstGeom>
+          <a:noFill/>
+        </p:spPr>
+        <p:txBody>
+          <a:bodyPr wrap="square">
+            <a:spAutoFit/>
+          </a:bodyPr>
+          <a:lstStyle/>
+          <a:p>
+            <a:pPr algn="ctr"/>
+            <a:r>
+              <a:rPr sz="1500" b="0">
+                <a:solidFill>
+                  <a:srgbClr val="FFD700"/>
+                </a:solidFill>
+              </a:rPr>
+              <a:t>★★☆</a:t>
+            </a:r>
+          </a:p>
+        </p:txBody>
+      </p:sp>
+      <p:sp>
+        <p:nvSpPr>
+          <p:cNvPr id="19" name="Rectangle 18"/>
+          <p:cNvSpPr/>
+          <p:nvPr/>
+        </p:nvSpPr>
+        <p:spPr>
+          <a:xfrm>
+            <a:off x="500000" y="2240000"/>
+            <a:ext cx="3000000" cy="480000"/>
+          </a:xfrm>
+          <a:prstGeom prst="rect">
+            <a:avLst/>
+          </a:prstGeom>
+          <a:solidFill>
+            <a:srgbClr val="2A2A42"/>
+          </a:solidFill>
+          <a:ln>
+            <a:noFill/>
+          </a:ln>
+        </p:spPr>
+        <p:style>
+          <a:lnRef idx="1">
+            <a:schemeClr val="accent1"/>
+          </a:lnRef>
+          <a:fillRef idx="3">
+            <a:schemeClr val="accent1"/>
+          </a:fillRef>
+          <a:effectRef idx="2">
+            <a:schemeClr val="accent1"/>
+          </a:effectRef>
+          <a:fontRef idx="minor">
+            <a:schemeClr val="lt1"/>
+          </a:fontRef>
+        </p:style>
+        <p:txBody>
+          <a:bodyPr rtlCol="0" anchor="ctr"/>
+          <a:lstStyle/>
+          <a:p>
+            <a:pPr algn="ctr"/>
+            <a:endParaRPr/>
+          </a:p>
+        </p:txBody>
+      </p:sp>
+      <p:sp>
+        <p:nvSpPr>
+          <p:cNvPr id="20" name="TextBox 19"/>
+          <p:cNvSpPr txBox="1"/>
+          <p:nvPr/>
+        </p:nvSpPr>
+        <p:spPr>
+          <a:xfrm>
+            <a:off x="580000" y="2340000"/>
+            <a:ext cx="2840000" cy="380000"/>
+          </a:xfrm>
+          <a:prstGeom prst="rect">
+            <a:avLst/>
+          </a:prstGeom>
+          <a:noFill/>
+        </p:spPr>
+        <p:txBody>
+          <a:bodyPr wrap="square">
+            <a:spAutoFit/>
+          </a:bodyPr>
+          <a:lstStyle/>
+          <a:p>
+            <a:pPr algn="l"/>
+            <a:r>
+              <a:rPr sz="1300" b="1">
+                <a:solidFill>
+                  <a:srgbClr val="E0E0E0"/>
+                </a:solidFill>
+              </a:rPr>
+              <a:t>Рассуждения</a:t>
+            </a:r>
+          </a:p>
+        </p:txBody>
+      </p:sp>
+      <p:sp>
+        <p:nvSpPr>
+          <p:cNvPr id="21" name="Rectangle 20"/>
+          <p:cNvSpPr/>
+          <p:nvPr/>
+        </p:nvSpPr>
+        <p:spPr>
+          <a:xfrm>
+            <a:off x="3560000" y="2240000"/>
+            <a:ext cx="2500000" cy="480000"/>
+          </a:xfrm>
+          <a:prstGeom prst="rect">
+            <a:avLst/>
+          </a:prstGeom>
+          <a:solidFill>
+            <a:srgbClr val="2A2A42"/>
+          </a:solidFill>
+          <a:ln>
+            <a:noFill/>
+          </a:ln>
+        </p:spPr>
+        <p:style>
+          <a:lnRef idx="1">
+            <a:schemeClr val="accent1"/>
+          </a:lnRef>
+          <a:fillRef idx="3">
+            <a:schemeClr val="accent1"/>
+          </a:fillRef>
+          <a:effectRef idx="2">
+            <a:schemeClr val="accent1"/>
+          </a:effectRef>
+          <a:fontRef idx="minor">
+            <a:schemeClr val="lt1"/>
+          </a:fontRef>
+        </p:style>
+        <p:txBody>
+          <a:bodyPr rtlCol="0" anchor="ctr"/>
+          <a:lstStyle/>
+          <a:p>
+            <a:pPr algn="ctr"/>
+            <a:endParaRPr/>
+          </a:p>
+        </p:txBody>
+      </p:sp>
+      <p:sp>
+        <p:nvSpPr>
+          <p:cNvPr id="22" name="TextBox 21"/>
+          <p:cNvSpPr txBox="1"/>
+          <p:nvPr/>
+        </p:nvSpPr>
+        <p:spPr>
+          <a:xfrm>
+            <a:off x="3640000" y="2340000"/>
+            <a:ext cx="2340000" cy="380000"/>
+          </a:xfrm>
+          <a:prstGeom prst="rect">
+            <a:avLst/>
+          </a:prstGeom>
+          <a:noFill/>
+        </p:spPr>
+        <p:txBody>
+          <a:bodyPr wrap="square">
+            <a:spAutoFit/>
+          </a:bodyPr>
+          <a:lstStyle/>
+          <a:p>
+            <a:pPr algn="ctr"/>
+            <a:r>
+              <a:rPr sz="1500" b="0">
+                <a:solidFill>
+                  <a:srgbClr val="FFD700"/>
+                </a:solidFill>
+              </a:rPr>
+              <a:t>★★★</a:t>
+            </a:r>
+          </a:p>
+        </p:txBody>
+      </p:sp>
+      <p:sp>
+        <p:nvSpPr>
+          <p:cNvPr id="23" name="Rectangle 22"/>
+          <p:cNvSpPr/>
+          <p:nvPr/>
+        </p:nvSpPr>
+        <p:spPr>
+          <a:xfrm>
+            <a:off x="6120000" y="2240000"/>
+            <a:ext cx="2700000" cy="480000"/>
+          </a:xfrm>
+          <a:prstGeom prst="rect">
+            <a:avLst/>
+          </a:prstGeom>
+          <a:solidFill>
+            <a:srgbClr val="2A2A42"/>
+          </a:solidFill>
+          <a:ln>
+            <a:noFill/>
+          </a:ln>
+        </p:spPr>
+        <p:style>
+          <a:lnRef idx="1">
+            <a:schemeClr val="accent1"/>
+          </a:lnRef>
+          <a:fillRef idx="3">
+            <a:schemeClr val="accent1"/>
+          </a:fillRef>
+          <a:effectRef idx="2">
+            <a:schemeClr val="accent1"/>
+          </a:effectRef>
+          <a:fontRef idx="minor">
+            <a:schemeClr val="lt1"/>
+          </a:fontRef>
+        </p:style>
+        <p:txBody>
+          <a:bodyPr rtlCol="0" anchor="ctr"/>
+          <a:lstStyle/>
+          <a:p>
+            <a:pPr algn="ctr"/>
+            <a:endParaRPr/>
+          </a:p>
+        </p:txBody>
+      </p:sp>
+      <p:sp>
+        <p:nvSpPr>
+          <p:cNvPr id="24" name="TextBox 23"/>
+          <p:cNvSpPr txBox="1"/>
+          <p:nvPr/>
+        </p:nvSpPr>
+        <p:spPr>
+          <a:xfrm>
+            <a:off x="6200000" y="2340000"/>
+            <a:ext cx="2540000" cy="380000"/>
+          </a:xfrm>
+          <a:prstGeom prst="rect">
+            <a:avLst/>
+          </a:prstGeom>
+          <a:noFill/>
+        </p:spPr>
+        <p:txBody>
+          <a:bodyPr wrap="square">
+            <a:spAutoFit/>
+          </a:bodyPr>
+          <a:lstStyle/>
+          <a:p>
+            <a:pPr algn="ctr"/>
+            <a:r>
+              <a:rPr sz="1500" b="0">
+                <a:solidFill>
+                  <a:srgbClr val="FFD700"/>
+                </a:solidFill>
+              </a:rPr>
+              <a:t>★★☆</a:t>
+            </a:r>
+          </a:p>
+        </p:txBody>
+      </p:sp>
+      <p:sp>
+        <p:nvSpPr>
+          <p:cNvPr id="25" name="Rectangle 24"/>
+          <p:cNvSpPr/>
+          <p:nvPr/>
+        </p:nvSpPr>
+        <p:spPr>
+          <a:xfrm>
+            <a:off x="8880000" y="2240000"/>
+            <a:ext cx="2600000" cy="480000"/>
+          </a:xfrm>
+          <a:prstGeom prst="rect">
+            <a:avLst/>
+          </a:prstGeom>
+          <a:solidFill>
+            <a:srgbClr val="2A2A42"/>
+          </a:solidFill>
+          <a:ln>
+            <a:noFill/>
+          </a:ln>
+        </p:spPr>
+        <p:style>
+          <a:lnRef idx="1">
+            <a:schemeClr val="accent1"/>
+          </a:lnRef>
+          <a:fillRef idx="3">
+            <a:schemeClr val="accent1"/>
+          </a:fillRef>
+          <a:effectRef idx="2">
+            <a:schemeClr val="accent1"/>
+          </a:effectRef>
+          <a:fontRef idx="minor">
+            <a:schemeClr val="lt1"/>
+          </a:fontRef>
+        </p:style>
+        <p:txBody>
+          <a:bodyPr rtlCol="0" anchor="ctr"/>
+          <a:lstStyle/>
+          <a:p>
+            <a:pPr algn="ctr"/>
+            <a:endParaRPr/>
+          </a:p>
+        </p:txBody>
+      </p:sp>
+      <p:sp>
+        <p:nvSpPr>
+          <p:cNvPr id="26" name="TextBox 25"/>
+          <p:cNvSpPr txBox="1"/>
+          <p:nvPr/>
+        </p:nvSpPr>
+        <p:spPr>
+          <a:xfrm>
+            <a:off x="8960000" y="2340000"/>
+            <a:ext cx="2440000" cy="380000"/>
+          </a:xfrm>
+          <a:prstGeom prst="rect">
+            <a:avLst/>
+          </a:prstGeom>
+          <a:noFill/>
+        </p:spPr>
+        <p:txBody>
+          <a:bodyPr wrap="square">
+            <a:spAutoFit/>
+          </a:bodyPr>
+          <a:lstStyle/>
+          <a:p>
+            <a:pPr algn="ctr"/>
+            <a:r>
+              <a:rPr sz="1500" b="0">
+                <a:solidFill>
+                  <a:srgbClr val="FFD700"/>
+                </a:solidFill>
+              </a:rPr>
+              <a:t>★★★</a:t>
+            </a:r>
+          </a:p>
+        </p:txBody>
+      </p:sp>
+      <p:sp>
+        <p:nvSpPr>
+          <p:cNvPr id="27" name="Rectangle 26"/>
+          <p:cNvSpPr/>
+          <p:nvPr/>
+        </p:nvSpPr>
+        <p:spPr>
+          <a:xfrm>
+            <a:off x="500000" y="2760000"/>
+            <a:ext cx="3000000" cy="480000"/>
+          </a:xfrm>
+          <a:prstGeom prst="rect">
+            <a:avLst/>
+          </a:prstGeom>
+          <a:solidFill>
+            <a:srgbClr val="222238"/>
+          </a:solidFill>
+          <a:ln>
+            <a:noFill/>
+          </a:ln>
+        </p:spPr>
+        <p:style>
+          <a:lnRef idx="1">
+            <a:schemeClr val="accent1"/>
+          </a:lnRef>
+          <a:fillRef idx="3">
+            <a:schemeClr val="accent1"/>
+          </a:fillRef>
+          <a:effectRef idx="2">
+            <a:schemeClr val="accent1"/>
+          </a:effectRef>
+          <a:fontRef idx="minor">
+            <a:schemeClr val="lt1"/>
+          </a:fontRef>
+        </p:style>
+        <p:txBody>
+          <a:bodyPr rtlCol="0" anchor="ctr"/>
+          <a:lstStyle/>
+          <a:p>
+            <a:pPr algn="ctr"/>
+            <a:endParaRPr/>
+          </a:p>
+        </p:txBody>
+      </p:sp>
+      <p:sp>
+        <p:nvSpPr>
+          <p:cNvPr id="28" name="TextBox 27"/>
+          <p:cNvSpPr txBox="1"/>
+          <p:nvPr/>
+        </p:nvSpPr>
+        <p:spPr>
+          <a:xfrm>
+            <a:off x="580000" y="2860000"/>
+            <a:ext cx="2840000" cy="380000"/>
+          </a:xfrm>
+          <a:prstGeom prst="rect">
+            <a:avLst/>
+          </a:prstGeom>
+          <a:noFill/>
+        </p:spPr>
+        <p:txBody>
+          <a:bodyPr wrap="square">
+            <a:spAutoFit/>
+          </a:bodyPr>
+          <a:lstStyle/>
+          <a:p>
+            <a:pPr algn="l"/>
+            <a:r>
+              <a:rPr sz="1300" b="1">
+                <a:solidFill>
+                  <a:srgbClr val="E0E0E0"/>
+                </a:solidFill>
+              </a:rPr>
+              <a:t>Большие документы</a:t>
+            </a:r>
+          </a:p>
+        </p:txBody>
+      </p:sp>
+      <p:sp>
+        <p:nvSpPr>
+          <p:cNvPr id="29" name="Rectangle 28"/>
+          <p:cNvSpPr/>
+          <p:nvPr/>
+        </p:nvSpPr>
+        <p:spPr>
+          <a:xfrm>
+            <a:off x="3560000" y="2760000"/>
+            <a:ext cx="2500000" cy="480000"/>
+          </a:xfrm>
+          <a:prstGeom prst="rect">
+            <a:avLst/>
+          </a:prstGeom>
+          <a:solidFill>
+            <a:srgbClr val="222238"/>
+          </a:solidFill>
+          <a:ln>
+            <a:noFill/>
+          </a:ln>
+        </p:spPr>
+        <p:style>
+          <a:lnRef idx="1">
+            <a:schemeClr val="accent1"/>
+          </a:lnRef>
+          <a:fillRef idx="3">
+            <a:schemeClr val="accent1"/>
+          </a:fillRef>
+          <a:effectRef idx="2">
+            <a:schemeClr val="accent1"/>
+          </a:effectRef>
+          <a:fontRef idx="minor">
+            <a:schemeClr val="lt1"/>
+          </a:fontRef>
+        </p:style>
+        <p:txBody>
+          <a:bodyPr rtlCol="0" anchor="ctr"/>
+          <a:lstStyle/>
+          <a:p>
+            <a:pPr algn="ctr"/>
+            <a:endParaRPr/>
+          </a:p>
+        </p:txBody>
+      </p:sp>
+      <p:sp>
+        <p:nvSpPr>
+          <p:cNvPr id="30" name="TextBox 29"/>
+          <p:cNvSpPr txBox="1"/>
+          <p:nvPr/>
+        </p:nvSpPr>
+        <p:spPr>
+          <a:xfrm>
+            <a:off x="3640000" y="2860000"/>
+            <a:ext cx="2340000" cy="380000"/>
+          </a:xfrm>
+          <a:prstGeom prst="rect">
+            <a:avLst/>
+          </a:prstGeom>
+          <a:noFill/>
+        </p:spPr>
+        <p:txBody>
+          <a:bodyPr wrap="square">
+            <a:spAutoFit/>
+          </a:bodyPr>
+          <a:lstStyle/>
+          <a:p>
+            <a:pPr algn="ctr"/>
+            <a:r>
+              <a:rPr sz="1500" b="0">
+                <a:solidFill>
+                  <a:srgbClr val="FFD700"/>
+                </a:solidFill>
+              </a:rPr>
+              <a:t>★★☆</a:t>
+            </a:r>
+          </a:p>
+        </p:txBody>
+      </p:sp>
+      <p:sp>
+        <p:nvSpPr>
+          <p:cNvPr id="31" name="Rectangle 30"/>
+          <p:cNvSpPr/>
+          <p:nvPr/>
+        </p:nvSpPr>
+        <p:spPr>
+          <a:xfrm>
+            <a:off x="6120000" y="2760000"/>
+            <a:ext cx="2700000" cy="480000"/>
+          </a:xfrm>
+          <a:prstGeom prst="rect">
+            <a:avLst/>
+          </a:prstGeom>
+          <a:solidFill>
+            <a:srgbClr val="222238"/>
+          </a:solidFill>
+          <a:ln>
+            <a:noFill/>
+          </a:ln>
+        </p:spPr>
+        <p:style>
+          <a:lnRef idx="1">
+            <a:schemeClr val="accent1"/>
+          </a:lnRef>
+          <a:fillRef idx="3">
+            <a:schemeClr val="accent1"/>
+          </a:fillRef>
+          <a:effectRef idx="2">
+            <a:schemeClr val="accent1"/>
+          </a:effectRef>
+          <a:fontRef idx="minor">
+            <a:schemeClr val="lt1"/>
+          </a:fontRef>
+        </p:style>
+        <p:txBody>
+          <a:bodyPr rtlCol="0" anchor="ctr"/>
+          <a:lstStyle/>
+          <a:p>
+            <a:pPr algn="ctr"/>
+            <a:endParaRPr/>
+          </a:p>
+        </p:txBody>
+      </p:sp>
+      <p:sp>
+        <p:nvSpPr>
+          <p:cNvPr id="32" name="TextBox 31"/>
+          <p:cNvSpPr txBox="1"/>
+          <p:nvPr/>
+        </p:nvSpPr>
+        <p:spPr>
+          <a:xfrm>
+            <a:off x="6200000" y="2860000"/>
+            <a:ext cx="2540000" cy="380000"/>
+          </a:xfrm>
+          <a:prstGeom prst="rect">
+            <a:avLst/>
+          </a:prstGeom>
+          <a:noFill/>
+        </p:spPr>
+        <p:txBody>
+          <a:bodyPr wrap="square">
+            <a:spAutoFit/>
+          </a:bodyPr>
+          <a:lstStyle/>
+          <a:p>
+            <a:pPr algn="ctr"/>
+            <a:r>
+              <a:rPr sz="1500" b="0">
+                <a:solidFill>
+                  <a:srgbClr val="FFD700"/>
+                </a:solidFill>
+              </a:rPr>
+              <a:t>★★★</a:t>
+            </a:r>
+          </a:p>
+        </p:txBody>
+      </p:sp>
+      <p:sp>
+        <p:nvSpPr>
+          <p:cNvPr id="33" name="Rectangle 32"/>
+          <p:cNvSpPr/>
+          <p:nvPr/>
+        </p:nvSpPr>
+        <p:spPr>
+          <a:xfrm>
+            <a:off x="8880000" y="2760000"/>
+            <a:ext cx="2600000" cy="480000"/>
+          </a:xfrm>
+          <a:prstGeom prst="rect">
+            <a:avLst/>
+          </a:prstGeom>
+          <a:solidFill>
+            <a:srgbClr val="222238"/>
+          </a:solidFill>
+          <a:ln>
+            <a:noFill/>
+          </a:ln>
+        </p:spPr>
+        <p:style>
+          <a:lnRef idx="1">
+            <a:schemeClr val="accent1"/>
+          </a:lnRef>
+          <a:fillRef idx="3">
+            <a:schemeClr val="accent1"/>
+          </a:fillRef>
+          <a:effectRef idx="2">
+            <a:schemeClr val="accent1"/>
+          </a:effectRef>
+          <a:fontRef idx="minor">
+            <a:schemeClr val="lt1"/>
+          </a:fontRef>
+        </p:style>
+        <p:txBody>
+          <a:bodyPr rtlCol="0" anchor="ctr"/>
+          <a:lstStyle/>
+          <a:p>
+            <a:pPr algn="ctr"/>
+            <a:endParaRPr/>
+          </a:p>
+        </p:txBody>
+      </p:sp>
+      <p:sp>
+        <p:nvSpPr>
+          <p:cNvPr id="34" name="TextBox 33"/>
+          <p:cNvSpPr txBox="1"/>
+          <p:nvPr/>
+        </p:nvSpPr>
+        <p:spPr>
+          <a:xfrm>
+            <a:off x="8960000" y="2860000"/>
+            <a:ext cx="2440000" cy="380000"/>
+          </a:xfrm>
+          <a:prstGeom prst="rect">
+            <a:avLst/>
+          </a:prstGeom>
+          <a:noFill/>
+        </p:spPr>
+        <p:txBody>
+          <a:bodyPr wrap="square">
+            <a:spAutoFit/>
+          </a:bodyPr>
+          <a:lstStyle/>
+          <a:p>
+            <a:pPr algn="ctr"/>
+            <a:r>
+              <a:rPr sz="1500" b="0">
+                <a:solidFill>
+                  <a:srgbClr val="FFD700"/>
+                </a:solidFill>
+              </a:rPr>
+              <a:t>★★★</a:t>
+            </a:r>
+          </a:p>
+        </p:txBody>
+      </p:sp>
+      <p:sp>
+        <p:nvSpPr>
+          <p:cNvPr id="35" name="Rectangle 34"/>
+          <p:cNvSpPr/>
+          <p:nvPr/>
+        </p:nvSpPr>
+        <p:spPr>
+          <a:xfrm>
+            <a:off x="500000" y="3280000"/>
+            <a:ext cx="3000000" cy="480000"/>
+          </a:xfrm>
+          <a:prstGeom prst="rect">
+            <a:avLst/>
+          </a:prstGeom>
+          <a:solidFill>
+            <a:srgbClr val="2A2A42"/>
+          </a:solidFill>
+          <a:ln>
+            <a:noFill/>
+          </a:ln>
+        </p:spPr>
+        <p:style>
+          <a:lnRef idx="1">
+            <a:schemeClr val="accent1"/>
+          </a:lnRef>
+          <a:fillRef idx="3">
+            <a:schemeClr val="accent1"/>
+          </a:fillRef>
+          <a:effectRef idx="2">
+            <a:schemeClr val="accent1"/>
+          </a:effectRef>
+          <a:fontRef idx="minor">
+            <a:schemeClr val="lt1"/>
+          </a:fontRef>
+        </p:style>
+        <p:txBody>
+          <a:bodyPr rtlCol="0" anchor="ctr"/>
+          <a:lstStyle/>
+          <a:p>
+            <a:pPr algn="ctr"/>
+            <a:endParaRPr/>
+          </a:p>
+        </p:txBody>
+      </p:sp>
+      <p:sp>
+        <p:nvSpPr>
+          <p:cNvPr id="36" name="TextBox 35"/>
+          <p:cNvSpPr txBox="1"/>
+          <p:nvPr/>
+        </p:nvSpPr>
+        <p:spPr>
+          <a:xfrm>
+            <a:off x="580000" y="3380000"/>
+            <a:ext cx="2840000" cy="380000"/>
+          </a:xfrm>
+          <a:prstGeom prst="rect">
+            <a:avLst/>
+          </a:prstGeom>
+          <a:noFill/>
+        </p:spPr>
+        <p:txBody>
+          <a:bodyPr wrap="square">
+            <a:spAutoFit/>
+          </a:bodyPr>
+          <a:lstStyle/>
+          <a:p>
+            <a:pPr algn="l"/>
+            <a:r>
+              <a:rPr sz="1300" b="1">
+                <a:solidFill>
+                  <a:srgbClr val="E0E0E0"/>
+                </a:solidFill>
+              </a:rPr>
+              <a:t>Мультимодальность</a:t>
+            </a:r>
+          </a:p>
+        </p:txBody>
+      </p:sp>
+      <p:sp>
+        <p:nvSpPr>
+          <p:cNvPr id="37" name="Rectangle 36"/>
+          <p:cNvSpPr/>
+          <p:nvPr/>
+        </p:nvSpPr>
+        <p:spPr>
+          <a:xfrm>
+            <a:off x="3560000" y="3280000"/>
+            <a:ext cx="2500000" cy="480000"/>
+          </a:xfrm>
+          <a:prstGeom prst="rect">
+            <a:avLst/>
+          </a:prstGeom>
+          <a:solidFill>
+            <a:srgbClr val="2A2A42"/>
+          </a:solidFill>
+          <a:ln>
+            <a:noFill/>
+          </a:ln>
+        </p:spPr>
+        <p:style>
+          <a:lnRef idx="1">
+            <a:schemeClr val="accent1"/>
+          </a:lnRef>
+          <a:fillRef idx="3">
+            <a:schemeClr val="accent1"/>
+          </a:fillRef>
+          <a:effectRef idx="2">
+            <a:schemeClr val="accent1"/>
+          </a:effectRef>
+          <a:fontRef idx="minor">
+            <a:schemeClr val="lt1"/>
+          </a:fontRef>
+        </p:style>
+        <p:txBody>
+          <a:bodyPr rtlCol="0" anchor="ctr"/>
+          <a:lstStyle/>
+          <a:p>
+            <a:pPr algn="ctr"/>
+            <a:endParaRPr/>
+          </a:p>
+        </p:txBody>
+      </p:sp>
+      <p:sp>
+        <p:nvSpPr>
+          <p:cNvPr id="38" name="TextBox 37"/>
+          <p:cNvSpPr txBox="1"/>
+          <p:nvPr/>
+        </p:nvSpPr>
+        <p:spPr>
+          <a:xfrm>
+            <a:off x="3640000" y="3380000"/>
+            <a:ext cx="2340000" cy="380000"/>
+          </a:xfrm>
+          <a:prstGeom prst="rect">
+            <a:avLst/>
+          </a:prstGeom>
+          <a:noFill/>
+        </p:spPr>
+        <p:txBody>
+          <a:bodyPr wrap="square">
+            <a:spAutoFit/>
+          </a:bodyPr>
+          <a:lstStyle/>
+          <a:p>
+            <a:pPr algn="ctr"/>
+            <a:r>
+              <a:rPr sz="1500" b="0">
+                <a:solidFill>
+                  <a:srgbClr val="FFD700"/>
+                </a:solidFill>
+              </a:rPr>
+              <a:t>★★☆</a:t>
+            </a:r>
+          </a:p>
+        </p:txBody>
+      </p:sp>
+      <p:sp>
+        <p:nvSpPr>
+          <p:cNvPr id="39" name="Rectangle 38"/>
+          <p:cNvSpPr/>
+          <p:nvPr/>
+        </p:nvSpPr>
+        <p:spPr>
+          <a:xfrm>
+            <a:off x="6120000" y="3280000"/>
+            <a:ext cx="2700000" cy="480000"/>
+          </a:xfrm>
+          <a:prstGeom prst="rect">
+            <a:avLst/>
+          </a:prstGeom>
+          <a:solidFill>
+            <a:srgbClr val="2A2A42"/>
+          </a:solidFill>
+          <a:ln>
+            <a:noFill/>
+          </a:ln>
+        </p:spPr>
+        <p:style>
+          <a:lnRef idx="1">
+            <a:schemeClr val="accent1"/>
+          </a:lnRef>
+          <a:fillRef idx="3">
+            <a:schemeClr val="accent1"/>
+          </a:fillRef>
+          <a:effectRef idx="2">
+            <a:schemeClr val="accent1"/>
+          </a:effectRef>
+          <a:fontRef idx="minor">
+            <a:schemeClr val="lt1"/>
+          </a:fontRef>
+        </p:style>
+        <p:txBody>
+          <a:bodyPr rtlCol="0" anchor="ctr"/>
+          <a:lstStyle/>
+          <a:p>
+            <a:pPr algn="ctr"/>
+            <a:endParaRPr/>
+          </a:p>
+        </p:txBody>
+      </p:sp>
+      <p:sp>
+        <p:nvSpPr>
+          <p:cNvPr id="40" name="TextBox 39"/>
+          <p:cNvSpPr txBox="1"/>
+          <p:nvPr/>
+        </p:nvSpPr>
+        <p:spPr>
+          <a:xfrm>
+            <a:off x="6200000" y="3380000"/>
+            <a:ext cx="2540000" cy="380000"/>
+          </a:xfrm>
+          <a:prstGeom prst="rect">
+            <a:avLst/>
+          </a:prstGeom>
+          <a:noFill/>
+        </p:spPr>
+        <p:txBody>
+          <a:bodyPr wrap="square">
+            <a:spAutoFit/>
+          </a:bodyPr>
+          <a:lstStyle/>
+          <a:p>
+            <a:pPr algn="ctr"/>
+            <a:r>
+              <a:rPr sz="1500" b="0">
+                <a:solidFill>
+                  <a:srgbClr val="FFD700"/>
+                </a:solidFill>
+              </a:rPr>
+              <a:t>★★★</a:t>
+            </a:r>
+          </a:p>
+        </p:txBody>
+      </p:sp>
+      <p:sp>
+        <p:nvSpPr>
+          <p:cNvPr id="41" name="Rectangle 40"/>
+          <p:cNvSpPr/>
+          <p:nvPr/>
+        </p:nvSpPr>
+        <p:spPr>
+          <a:xfrm>
+            <a:off x="8880000" y="3280000"/>
+            <a:ext cx="2600000" cy="480000"/>
+          </a:xfrm>
+          <a:prstGeom prst="rect">
+            <a:avLst/>
+          </a:prstGeom>
+          <a:solidFill>
+            <a:srgbClr val="2A2A42"/>
+          </a:solidFill>
+          <a:ln>
+            <a:noFill/>
+          </a:ln>
+        </p:spPr>
+        <p:style>
+          <a:lnRef idx="1">
+            <a:schemeClr val="accent1"/>
+          </a:lnRef>
+          <a:fillRef idx="3">
+            <a:schemeClr val="accent1"/>
+          </a:fillRef>
+          <a:effectRef idx="2">
+            <a:schemeClr val="accent1"/>
+          </a:effectRef>
+          <a:fontRef idx="minor">
+            <a:schemeClr val="lt1"/>
+          </a:fontRef>
+        </p:style>
+        <p:txBody>
+          <a:bodyPr rtlCol="0" anchor="ctr"/>
+          <a:lstStyle/>
+          <a:p>
+            <a:pPr algn="ctr"/>
+            <a:endParaRPr/>
+          </a:p>
+        </p:txBody>
+      </p:sp>
+      <p:sp>
+        <p:nvSpPr>
+          <p:cNvPr id="42" name="TextBox 41"/>
+          <p:cNvSpPr txBox="1"/>
+          <p:nvPr/>
+        </p:nvSpPr>
+        <p:spPr>
+          <a:xfrm>
+            <a:off x="8960000" y="3380000"/>
+            <a:ext cx="2440000" cy="380000"/>
+          </a:xfrm>
+          <a:prstGeom prst="rect">
+            <a:avLst/>
+          </a:prstGeom>
+          <a:noFill/>
+        </p:spPr>
+        <p:txBody>
+          <a:bodyPr wrap="square">
+            <a:spAutoFit/>
+          </a:bodyPr>
+          <a:lstStyle/>
+          <a:p>
+            <a:pPr algn="ctr"/>
+            <a:r>
+              <a:rPr sz="1500" b="0">
+                <a:solidFill>
+                  <a:srgbClr val="FFD700"/>
+                </a:solidFill>
+              </a:rPr>
+              <a:t>★★★</a:t>
+            </a:r>
+          </a:p>
+        </p:txBody>
+      </p:sp>
+      <p:sp>
+        <p:nvSpPr>
+          <p:cNvPr id="43" name="Rectangle 42"/>
+          <p:cNvSpPr/>
+          <p:nvPr/>
+        </p:nvSpPr>
+        <p:spPr>
+          <a:xfrm>
+            <a:off x="500000" y="3800000"/>
+            <a:ext cx="3000000" cy="480000"/>
+          </a:xfrm>
+          <a:prstGeom prst="rect">
+            <a:avLst/>
+          </a:prstGeom>
+          <a:solidFill>
+            <a:srgbClr val="222238"/>
+          </a:solidFill>
+          <a:ln>
+            <a:noFill/>
+          </a:ln>
+        </p:spPr>
+        <p:style>
+          <a:lnRef idx="1">
+            <a:schemeClr val="accent1"/>
+          </a:lnRef>
+          <a:fillRef idx="3">
+            <a:schemeClr val="accent1"/>
+          </a:fillRef>
+          <a:effectRef idx="2">
+            <a:schemeClr val="accent1"/>
+          </a:effectRef>
+          <a:fontRef idx="minor">
+            <a:schemeClr val="lt1"/>
+          </a:fontRef>
+        </p:style>
+        <p:txBody>
+          <a:bodyPr rtlCol="0" anchor="ctr"/>
+          <a:lstStyle/>
+          <a:p>
+            <a:pPr algn="ctr"/>
+            <a:endParaRPr/>
+          </a:p>
+        </p:txBody>
+      </p:sp>
+      <p:sp>
+        <p:nvSpPr>
+          <p:cNvPr id="44" name="TextBox 43"/>
+          <p:cNvSpPr txBox="1"/>
+          <p:nvPr/>
+        </p:nvSpPr>
+        <p:spPr>
+          <a:xfrm>
+            <a:off x="580000" y="3900000"/>
+            <a:ext cx="2840000" cy="380000"/>
+          </a:xfrm>
+          <a:prstGeom prst="rect">
+            <a:avLst/>
+          </a:prstGeom>
+          <a:noFill/>
+        </p:spPr>
+        <p:txBody>
+          <a:bodyPr wrap="square">
+            <a:spAutoFit/>
+          </a:bodyPr>
+          <a:lstStyle/>
+          <a:p>
+            <a:pPr algn="l"/>
+            <a:r>
+              <a:rPr sz="1300" b="1">
+                <a:solidFill>
+                  <a:srgbClr val="E0E0E0"/>
+                </a:solidFill>
+              </a:rPr>
+              <a:t>Экосистема</a:t>
+            </a:r>
+          </a:p>
+        </p:txBody>
+      </p:sp>
+      <p:sp>
+        <p:nvSpPr>
+          <p:cNvPr id="45" name="Rectangle 44"/>
+          <p:cNvSpPr/>
+          <p:nvPr/>
+        </p:nvSpPr>
+        <p:spPr>
+          <a:xfrm>
+            <a:off x="3560000" y="3800000"/>
+            <a:ext cx="2500000" cy="480000"/>
+          </a:xfrm>
+          <a:prstGeom prst="rect">
+            <a:avLst/>
+          </a:prstGeom>
+          <a:solidFill>
+            <a:srgbClr val="222238"/>
+          </a:solidFill>
+          <a:ln>
+            <a:noFill/>
+          </a:ln>
+        </p:spPr>
+        <p:style>
+          <a:lnRef idx="1">
+            <a:schemeClr val="accent1"/>
+          </a:lnRef>
+          <a:fillRef idx="3">
+            <a:schemeClr val="accent1"/>
+          </a:fillRef>
+          <a:effectRef idx="2">
+            <a:schemeClr val="accent1"/>
+          </a:effectRef>
+          <a:fontRef idx="minor">
+            <a:schemeClr val="lt1"/>
+          </a:fontRef>
+        </p:style>
+        <p:txBody>
+          <a:bodyPr rtlCol="0" anchor="ctr"/>
+          <a:lstStyle/>
+          <a:p>
+            <a:pPr algn="ctr"/>
+            <a:endParaRPr/>
+          </a:p>
+        </p:txBody>
+      </p:sp>
+      <p:sp>
+        <p:nvSpPr>
+          <p:cNvPr id="46" name="TextBox 45"/>
+          <p:cNvSpPr txBox="1"/>
+          <p:nvPr/>
+        </p:nvSpPr>
+        <p:spPr>
+          <a:xfrm>
+            <a:off x="3640000" y="3900000"/>
+            <a:ext cx="2340000" cy="380000"/>
+          </a:xfrm>
+          <a:prstGeom prst="rect">
+            <a:avLst/>
+          </a:prstGeom>
+          <a:noFill/>
+        </p:spPr>
+        <p:txBody>
+          <a:bodyPr wrap="square">
+            <a:spAutoFit/>
+          </a:bodyPr>
+          <a:lstStyle/>
+          <a:p>
+            <a:pPr algn="ctr"/>
+            <a:r>
+              <a:rPr sz="1500" b="0">
+                <a:solidFill>
+                  <a:srgbClr val="FFD700"/>
+                </a:solidFill>
+              </a:rPr>
+              <a:t>★★☆</a:t>
+            </a:r>
+          </a:p>
+        </p:txBody>
+      </p:sp>
+      <p:sp>
+        <p:nvSpPr>
+          <p:cNvPr id="47" name="Rectangle 46"/>
+          <p:cNvSpPr/>
+          <p:nvPr/>
+        </p:nvSpPr>
+        <p:spPr>
+          <a:xfrm>
+            <a:off x="6120000" y="3800000"/>
+            <a:ext cx="2700000" cy="480000"/>
+          </a:xfrm>
+          <a:prstGeom prst="rect">
+            <a:avLst/>
+          </a:prstGeom>
+          <a:solidFill>
+            <a:srgbClr val="222238"/>
+          </a:solidFill>
+          <a:ln>
+            <a:noFill/>
+          </a:ln>
+        </p:spPr>
+        <p:style>
+          <a:lnRef idx="1">
+            <a:schemeClr val="accent1"/>
+          </a:lnRef>
+          <a:fillRef idx="3">
+            <a:schemeClr val="accent1"/>
+          </a:fillRef>
+          <a:effectRef idx="2">
+            <a:schemeClr val="accent1"/>
+          </a:effectRef>
+          <a:fontRef idx="minor">
+            <a:schemeClr val="lt1"/>
+          </a:fontRef>
+        </p:style>
+        <p:txBody>
+          <a:bodyPr rtlCol="0" anchor="ctr"/>
+          <a:lstStyle/>
+          <a:p>
+            <a:pPr algn="ctr"/>
+            <a:endParaRPr/>
+          </a:p>
+        </p:txBody>
+      </p:sp>
+      <p:sp>
+        <p:nvSpPr>
+          <p:cNvPr id="48" name="TextBox 47"/>
+          <p:cNvSpPr txBox="1"/>
+          <p:nvPr/>
+        </p:nvSpPr>
+        <p:spPr>
+          <a:xfrm>
+            <a:off x="6200000" y="3900000"/>
+            <a:ext cx="2540000" cy="380000"/>
+          </a:xfrm>
+          <a:prstGeom prst="rect">
+            <a:avLst/>
+          </a:prstGeom>
+          <a:noFill/>
+        </p:spPr>
+        <p:txBody>
+          <a:bodyPr wrap="square">
+            <a:spAutoFit/>
+          </a:bodyPr>
+          <a:lstStyle/>
+          <a:p>
+            <a:pPr algn="ctr"/>
+            <a:r>
+              <a:rPr sz="1500" b="0">
+                <a:solidFill>
+                  <a:srgbClr val="FFD700"/>
+                </a:solidFill>
+              </a:rPr>
+              <a:t>★★★</a:t>
+            </a:r>
+          </a:p>
+        </p:txBody>
+      </p:sp>
+      <p:sp>
+        <p:nvSpPr>
+          <p:cNvPr id="49" name="Rectangle 48"/>
+          <p:cNvSpPr/>
+          <p:nvPr/>
+        </p:nvSpPr>
+        <p:spPr>
+          <a:xfrm>
+            <a:off x="8880000" y="3800000"/>
+            <a:ext cx="2600000" cy="480000"/>
+          </a:xfrm>
+          <a:prstGeom prst="rect">
+            <a:avLst/>
+          </a:prstGeom>
+          <a:solidFill>
+            <a:srgbClr val="222238"/>
+          </a:solidFill>
+          <a:ln>
+            <a:noFill/>
+          </a:ln>
+        </p:spPr>
+        <p:style>
+          <a:lnRef idx="1">
+            <a:schemeClr val="accent1"/>
+          </a:lnRef>
+          <a:fillRef idx="3">
+            <a:schemeClr val="accent1"/>
+          </a:fillRef>
+          <a:effectRef idx="2">
+            <a:schemeClr val="accent1"/>
+          </a:effectRef>
+          <a:fontRef idx="minor">
+            <a:schemeClr val="lt1"/>
+          </a:fontRef>
+        </p:style>
+        <p:txBody>
+          <a:bodyPr rtlCol="0" anchor="ctr"/>
+          <a:lstStyle/>
+          <a:p>
+            <a:pPr algn="ctr"/>
+            <a:endParaRPr/>
+          </a:p>
+        </p:txBody>
+      </p:sp>
+      <p:sp>
+        <p:nvSpPr>
+          <p:cNvPr id="50" name="TextBox 49"/>
+          <p:cNvSpPr txBox="1"/>
+          <p:nvPr/>
+        </p:nvSpPr>
+        <p:spPr>
+          <a:xfrm>
+            <a:off x="8960000" y="3900000"/>
+            <a:ext cx="2440000" cy="380000"/>
+          </a:xfrm>
+          <a:prstGeom prst="rect">
+            <a:avLst/>
+          </a:prstGeom>
+          <a:noFill/>
+        </p:spPr>
+        <p:txBody>
+          <a:bodyPr wrap="square">
+            <a:spAutoFit/>
+          </a:bodyPr>
+          <a:lstStyle/>
+          <a:p>
+            <a:pPr algn="ctr"/>
+            <a:r>
+              <a:rPr sz="1500" b="0">
+                <a:solidFill>
+                  <a:srgbClr val="FFD700"/>
+                </a:solidFill>
+              </a:rPr>
+              <a:t>★★★</a:t>
+            </a:r>
+          </a:p>
+        </p:txBody>
+      </p:sp>
+      <p:sp>
+        <p:nvSpPr>
+          <p:cNvPr id="51" name="Rectangle 50"/>
+          <p:cNvSpPr/>
+          <p:nvPr/>
+        </p:nvSpPr>
+        <p:spPr>
+          <a:xfrm>
+            <a:off x="500000" y="4320000"/>
+            <a:ext cx="3000000" cy="480000"/>
+          </a:xfrm>
+          <a:prstGeom prst="rect">
+            <a:avLst/>
+          </a:prstGeom>
+          <a:solidFill>
+            <a:srgbClr val="2A2A42"/>
+          </a:solidFill>
+          <a:ln>
+            <a:noFill/>
+          </a:ln>
+        </p:spPr>
+        <p:style>
+          <a:lnRef idx="1">
+            <a:schemeClr val="accent1"/>
+          </a:lnRef>
+          <a:fillRef idx="3">
+            <a:schemeClr val="accent1"/>
+          </a:fillRef>
+          <a:effectRef idx="2">
+            <a:schemeClr val="accent1"/>
+          </a:effectRef>
+          <a:fontRef idx="minor">
+            <a:schemeClr val="lt1"/>
+          </a:fontRef>
+        </p:style>
+        <p:txBody>
+          <a:bodyPr rtlCol="0" anchor="ctr"/>
+          <a:lstStyle/>
+          <a:p>
+            <a:pPr algn="ctr"/>
+            <a:endParaRPr/>
+          </a:p>
+        </p:txBody>
+      </p:sp>
+      <p:sp>
+        <p:nvSpPr>
+          <p:cNvPr id="52" name="TextBox 51"/>
+          <p:cNvSpPr txBox="1"/>
+          <p:nvPr/>
+        </p:nvSpPr>
+        <p:spPr>
+          <a:xfrm>
+            <a:off x="580000" y="4420000"/>
+            <a:ext cx="2840000" cy="380000"/>
+          </a:xfrm>
+          <a:prstGeom prst="rect">
+            <a:avLst/>
+          </a:prstGeom>
+          <a:noFill/>
+        </p:spPr>
+        <p:txBody>
+          <a:bodyPr wrap="square">
+            <a:spAutoFit/>
+          </a:bodyPr>
+          <a:lstStyle/>
+          <a:p>
+            <a:pPr algn="l"/>
+            <a:r>
+              <a:rPr sz="1300" b="1">
+                <a:solidFill>
+                  <a:srgbClr val="E0E0E0"/>
+                </a:solidFill>
+              </a:rPr>
+              <a:t>Computer Use</a:t>
+            </a:r>
+          </a:p>
+        </p:txBody>
+      </p:sp>
+      <p:sp>
+        <p:nvSpPr>
+          <p:cNvPr id="53" name="Rectangle 52"/>
+          <p:cNvSpPr/>
+          <p:nvPr/>
+        </p:nvSpPr>
+        <p:spPr>
+          <a:xfrm>
+            <a:off x="3560000" y="4320000"/>
+            <a:ext cx="2500000" cy="480000"/>
+          </a:xfrm>
+          <a:prstGeom prst="rect">
+            <a:avLst/>
+          </a:prstGeom>
+          <a:solidFill>
+            <a:srgbClr val="2A2A42"/>
+          </a:solidFill>
+          <a:ln>
+            <a:noFill/>
+          </a:ln>
+        </p:spPr>
+        <p:style>
+          <a:lnRef idx="1">
+            <a:schemeClr val="accent1"/>
+          </a:lnRef>
+          <a:fillRef idx="3">
+            <a:schemeClr val="accent1"/>
+          </a:fillRef>
+          <a:effectRef idx="2">
+            <a:schemeClr val="accent1"/>
+          </a:effectRef>
+          <a:fontRef idx="minor">
+            <a:schemeClr val="lt1"/>
+          </a:fontRef>
+        </p:style>
+        <p:txBody>
+          <a:bodyPr rtlCol="0" anchor="ctr"/>
+          <a:lstStyle/>
+          <a:p>
+            <a:pPr algn="ctr"/>
+            <a:endParaRPr/>
+          </a:p>
+        </p:txBody>
+      </p:sp>
+      <p:sp>
+        <p:nvSpPr>
+          <p:cNvPr id="54" name="TextBox 53"/>
+          <p:cNvSpPr txBox="1"/>
+          <p:nvPr/>
+        </p:nvSpPr>
+        <p:spPr>
+          <a:xfrm>
+            <a:off x="3640000" y="4420000"/>
+            <a:ext cx="2340000" cy="380000"/>
+          </a:xfrm>
+          <a:prstGeom prst="rect">
+            <a:avLst/>
+          </a:prstGeom>
+          <a:noFill/>
+        </p:spPr>
+        <p:txBody>
+          <a:bodyPr wrap="square">
+            <a:spAutoFit/>
+          </a:bodyPr>
+          <a:lstStyle/>
+          <a:p>
+            <a:pPr algn="ctr"/>
+            <a:r>
+              <a:rPr sz="1500" b="0">
+                <a:solidFill>
+                  <a:srgbClr val="FFD700"/>
+                </a:solidFill>
+              </a:rPr>
+              <a:t>☆☆☆</a:t>
+            </a:r>
+          </a:p>
+        </p:txBody>
+      </p:sp>
+      <p:sp>
+        <p:nvSpPr>
+          <p:cNvPr id="55" name="Rectangle 54"/>
+          <p:cNvSpPr/>
+          <p:nvPr/>
+        </p:nvSpPr>
+        <p:spPr>
+          <a:xfrm>
+            <a:off x="6120000" y="4320000"/>
+            <a:ext cx="2700000" cy="480000"/>
+          </a:xfrm>
+          <a:prstGeom prst="rect">
+            <a:avLst/>
+          </a:prstGeom>
+          <a:solidFill>
+            <a:srgbClr val="2A2A42"/>
+          </a:solidFill>
+          <a:ln>
+            <a:noFill/>
+          </a:ln>
+        </p:spPr>
+        <p:style>
+          <a:lnRef idx="1">
+            <a:schemeClr val="accent1"/>
+          </a:lnRef>
+          <a:fillRef idx="3">
+            <a:schemeClr val="accent1"/>
+          </a:fillRef>
+          <a:effectRef idx="2">
+            <a:schemeClr val="accent1"/>
+          </a:effectRef>
+          <a:fontRef idx="minor">
+            <a:schemeClr val="lt1"/>
+          </a:fontRef>
+        </p:style>
+        <p:txBody>
+          <a:bodyPr rtlCol="0" anchor="ctr"/>
+          <a:lstStyle/>
+          <a:p>
+            <a:pPr algn="ctr"/>
+            <a:endParaRPr/>
+          </a:p>
+        </p:txBody>
+      </p:sp>
+      <p:sp>
+        <p:nvSpPr>
+          <p:cNvPr id="56" name="TextBox 55"/>
+          <p:cNvSpPr txBox="1"/>
+          <p:nvPr/>
+        </p:nvSpPr>
+        <p:spPr>
+          <a:xfrm>
+            <a:off x="6200000" y="4420000"/>
+            <a:ext cx="2540000" cy="380000"/>
+          </a:xfrm>
+          <a:prstGeom prst="rect">
+            <a:avLst/>
+          </a:prstGeom>
+          <a:noFill/>
+        </p:spPr>
+        <p:txBody>
+          <a:bodyPr wrap="square">
+            <a:spAutoFit/>
+          </a:bodyPr>
+          <a:lstStyle/>
+          <a:p>
+            <a:pPr algn="ctr"/>
+            <a:r>
+              <a:rPr sz="1500" b="0">
+                <a:solidFill>
+                  <a:srgbClr val="FFD700"/>
+                </a:solidFill>
+              </a:rPr>
+              <a:t>★★★</a:t>
+            </a:r>
+          </a:p>
+        </p:txBody>
+      </p:sp>
+      <p:sp>
+        <p:nvSpPr>
+          <p:cNvPr id="57" name="Rectangle 56"/>
+          <p:cNvSpPr/>
+          <p:nvPr/>
+        </p:nvSpPr>
+        <p:spPr>
+          <a:xfrm>
+            <a:off x="8880000" y="4320000"/>
+            <a:ext cx="2600000" cy="480000"/>
+          </a:xfrm>
+          <a:prstGeom prst="rect">
+            <a:avLst/>
+          </a:prstGeom>
+          <a:solidFill>
+            <a:srgbClr val="2A2A42"/>
+          </a:solidFill>
+          <a:ln>
+            <a:noFill/>
+          </a:ln>
+        </p:spPr>
+        <p:style>
+          <a:lnRef idx="1">
+            <a:schemeClr val="accent1"/>
+          </a:lnRef>
+          <a:fillRef idx="3">
+            <a:schemeClr val="accent1"/>
+          </a:fillRef>
+          <a:effectRef idx="2">
+            <a:schemeClr val="accent1"/>
+          </a:effectRef>
+          <a:fontRef idx="minor">
+            <a:schemeClr val="lt1"/>
+          </a:fontRef>
+        </p:style>
+        <p:txBody>
+          <a:bodyPr rtlCol="0" anchor="ctr"/>
+          <a:lstStyle/>
+          <a:p>
+            <a:pPr algn="ctr"/>
+            <a:endParaRPr/>
+          </a:p>
+        </p:txBody>
+      </p:sp>
+      <p:sp>
+        <p:nvSpPr>
+          <p:cNvPr id="58" name="TextBox 57"/>
+          <p:cNvSpPr txBox="1"/>
+          <p:nvPr/>
+        </p:nvSpPr>
+        <p:spPr>
+          <a:xfrm>
+            <a:off x="8960000" y="4420000"/>
+            <a:ext cx="2440000" cy="380000"/>
+          </a:xfrm>
+          <a:prstGeom prst="rect">
+            <a:avLst/>
+          </a:prstGeom>
+          <a:noFill/>
+        </p:spPr>
+        <p:txBody>
+          <a:bodyPr wrap="square">
+            <a:spAutoFit/>
+          </a:bodyPr>
+          <a:lstStyle/>
+          <a:p>
+            <a:pPr algn="ctr"/>
+            <a:r>
+              <a:rPr sz="1500" b="0">
+                <a:solidFill>
+                  <a:srgbClr val="FFD700"/>
+                </a:solidFill>
+              </a:rPr>
+              <a:t>★★☆</a:t>
+            </a:r>
+          </a:p>
+        </p:txBody>
+      </p:sp>
+      <p:sp>
+        <p:nvSpPr>
+          <p:cNvPr id="59" name="TextBox 58"/>
+          <p:cNvSpPr txBox="1"/>
+          <p:nvPr/>
+        </p:nvSpPr>
+        <p:spPr>
+          <a:xfrm>
+            <a:off x="500000" y="5700000"/>
+            <a:ext cx="11000000" cy="600000"/>
+          </a:xfrm>
+          <a:prstGeom prst="rect">
+            <a:avLst/>
+          </a:prstGeom>
+          <a:noFill/>
+        </p:spPr>
+        <p:txBody>
+          <a:bodyPr wrap="square">
+            <a:spAutoFit/>
+          </a:bodyPr>
+          <a:lstStyle/>
+          <a:p>
+            <a:pPr algn="ctr"/>
+            <a:r>
+              <a:rPr sz="1300" b="0">
+                <a:solidFill>
+                  <a:srgbClr val="AACCFF"/>
+                </a:solidFill>
+              </a:rPr>
+              <a:t>Вывод: Claude → код и текст  •  ChatGPT → универсальность и агенты  •  Gemini → большие документы и Google-экосистема</a:t>
+            </a:r>
+          </a:p>
+        </p:txBody>
+      </p:sp>
+    </p:spTree>
+  </p:cSld>
+  <p:clrMapOvr>
+    <a:masterClrMapping/>
+  </p:clrMapOvr>
+</p:sld>
+</file>
+
 <file path=ppt/slides/slide3.xml><?xml version="1.0" encoding="utf-8"?>
 <p:sld xmlns:a="http://schemas.openxmlformats.org/drawingml/2006/main" xmlns:r="http://schemas.openxmlformats.org/officeDocument/2006/relationships" xmlns:p="http://schemas.openxmlformats.org/presentationml/2006/main">
   <p:cSld>
